--- a/Umubyeyi_Presentation.pptx
+++ b/Umubyeyi_Presentation.pptx
@@ -3262,7 +3262,7 @@
               </a:defRPr>
             </a:pPr>
             <a:r>
-              <a:t>32 automated tests: unit, parameterized, boundary, invalid-input, offline and HTTP integration.</a:t>
+              <a:t>66 automated tests: unit, boundary, invalid-input, offline, HTTP, safety and evaluation integrity.</a:t>
             </a:r>
           </a:p>
           <a:p>
@@ -3277,7 +3277,7 @@
               </a:defRPr>
             </a:pPr>
             <a:r>
-              <a:t>English/RW retrieval, crisis routing, referrals, scope rejection and check-in contract verified.</a:t>
+              <a:t>Layered results: classifiers, question matching, generation quality, safety routing and latency.</a:t>
             </a:r>
           </a:p>
           <a:p>
@@ -3292,6 +3292,51 @@
               </a:defRPr>
             </a:pPr>
             <a:r>
+              <a:t>Trained topic classifier: Top-1 85.71%, Top-3 96.43%, macro-F1 85.99% on 28 controlled cases.</a:t>
+            </a:r>
+          </a:p>
+          <a:p>
+            <a:pPr>
+              <a:spcAft>
+                <a:spcPts val="1500"/>
+              </a:spcAft>
+              <a:defRPr sz="1800">
+                <a:solidFill>
+                  <a:srgbClr val="302A32"/>
+                </a:solidFill>
+              </a:defRPr>
+            </a:pPr>
+            <a:r>
+              <a:t>English retrieval: Top-1 64.29%, Top-3 92.86% on 14 controlled paraphrases.</a:t>
+            </a:r>
+          </a:p>
+          <a:p>
+            <a:pPr>
+              <a:spcAft>
+                <a:spcPts val="1500"/>
+              </a:spcAft>
+              <a:defRPr sz="1800">
+                <a:solidFill>
+                  <a:srgbClr val="302A32"/>
+                </a:solidFill>
+              </a:defRPr>
+            </a:pPr>
+            <a:r>
+              <a:t>Controlled RW retrieval and safety routing reached 100%; neither is real-user validation.</a:t>
+            </a:r>
+          </a:p>
+          <a:p>
+            <a:pPr>
+              <a:spcAft>
+                <a:spcPts val="1500"/>
+              </a:spcAft>
+              <a:defRPr sz="1800">
+                <a:solidFill>
+                  <a:srgbClr val="302A32"/>
+                </a:solidFill>
+              </a:defRPr>
+            </a:pPr>
+            <a:r>
               <a:t>Production Next.js build passes.</a:t>
             </a:r>
           </a:p>
@@ -3307,29 +3352,14 @@
               </a:defRPr>
             </a:pPr>
             <a:r>
-              <a:t>100-run fallback benchmark: retrieval median 3–4 ms; check-in median 15.3 ms.</a:t>
-            </a:r>
-          </a:p>
-          <a:p>
-            <a:pPr>
-              <a:spcAft>
-                <a:spcPts val="1500"/>
-              </a:spcAft>
-              <a:defRPr sz="1800">
-                <a:solidFill>
-                  <a:srgbClr val="302A32"/>
-                </a:solidFill>
-              </a:defRPr>
-            </a:pPr>
-            <a:r>
-              <a:t>Demo values: emotional, reformulated, Kinyarwanda, crisis, clinical, unrelated and check-in.</a:t>
+              <a:t>All cases and metrics are retained as JSON for audit and reproduction.</a:t>
             </a:r>
           </a:p>
         </p:txBody>
       </p:sp>
       <p:pic>
         <p:nvPicPr>
-          <p:cNvPr id="4" name="Picture 3" descr="conversationtest.png"/>
+          <p:cNvPr id="4" name="Picture 3" descr="layered_evaluation_summary.png"/>
           <p:cNvPicPr>
             <a:picLocks noChangeAspect="1"/>
           </p:cNvPicPr>
@@ -3344,7 +3374,7 @@
         <p:spPr>
           <a:xfrm>
             <a:off x="6446520" y="1508760"/>
-            <a:ext cx="5257800" cy="2417820"/>
+            <a:ext cx="5257800" cy="3349694"/>
           </a:xfrm>
           <a:prstGeom prst="rect">
             <a:avLst/>
@@ -3421,7 +3451,7 @@
         <p:spPr>
           <a:xfrm>
             <a:off x="731520" y="1508760"/>
-            <a:ext cx="10698480" cy="4709160"/>
+            <a:ext cx="5486400" cy="4709160"/>
           </a:xfrm>
           <a:prstGeom prst="rect">
             <a:avLst/>
@@ -3438,78 +3468,132 @@
               <a:spcAft>
                 <a:spcPts val="1500"/>
               </a:spcAft>
-              <a:defRPr sz="2000">
-                <a:solidFill>
-                  <a:srgbClr val="302A32"/>
-                </a:solidFill>
-              </a:defRPr>
-            </a:pPr>
-            <a:r>
-              <a:t>Trained here: two seven-model screening experiments and saved selected pipelines.</a:t>
-            </a:r>
-          </a:p>
-          <a:p>
-            <a:pPr>
-              <a:spcAft>
-                <a:spcPts val="1500"/>
-              </a:spcAft>
-              <a:defRPr sz="2000">
-                <a:solidFill>
-                  <a:srgbClr val="302A32"/>
-                </a:solidFill>
-              </a:defRPr>
-            </a:pPr>
-            <a:r>
-              <a:t>Built here: preprocessing, retrieval, safety policy, API integration, OOP services and interface.</a:t>
-            </a:r>
-          </a:p>
-          <a:p>
-            <a:pPr>
-              <a:spcAft>
-                <a:spcPts val="1500"/>
-              </a:spcAft>
-              <a:defRPr sz="2000">
-                <a:solidFill>
-                  <a:srgbClr val="302A32"/>
-                </a:solidFill>
-              </a:defRPr>
-            </a:pPr>
-            <a:r>
-              <a:t>Ollama model: pretrained Gemma 3 4B with project instructions; weights were not fine-tuned.</a:t>
-            </a:r>
-          </a:p>
-          <a:p>
-            <a:pPr>
-              <a:spcAft>
-                <a:spcPts val="1500"/>
-              </a:spcAft>
-              <a:defRPr sz="2000">
-                <a:solidFill>
-                  <a:srgbClr val="302A32"/>
-                </a:solidFill>
-              </a:defRPr>
-            </a:pPr>
-            <a:r>
-              <a:t>Participant rows are structured risk-factor data, not conversation examples.</a:t>
-            </a:r>
-          </a:p>
-          <a:p>
-            <a:pPr>
-              <a:spcAft>
-                <a:spcPts val="1500"/>
-              </a:spcAft>
-              <a:defRPr sz="2000">
-                <a:solidFill>
-                  <a:srgbClr val="302A32"/>
-                </a:solidFill>
-              </a:defRPr>
-            </a:pPr>
-            <a:r>
-              <a:t>A reviewed bilingual conversation corpus is required before defensible fine-tuning.</a:t>
-            </a:r>
-          </a:p>
-        </p:txBody>
-      </p:sp>
+              <a:defRPr sz="1800">
+                <a:solidFill>
+                  <a:srgbClr val="302A32"/>
+                </a:solidFill>
+              </a:defRPr>
+            </a:pPr>
+            <a:r>
+              <a:t>Trained here: two screening experiments, bilingual topic classification, and mT5 LoRA generation.</a:t>
+            </a:r>
+          </a:p>
+          <a:p>
+            <a:pPr>
+              <a:spcAft>
+                <a:spcPts val="1500"/>
+              </a:spcAft>
+              <a:defRPr sz="1800">
+                <a:solidFill>
+                  <a:srgbClr val="302A32"/>
+                </a:solidFill>
+              </a:defRPr>
+            </a:pPr>
+            <a:r>
+              <a:t>Built here: preprocessing, retrieval, safety policy, grounded Gemini integration, OOP services and interface.</a:t>
+            </a:r>
+          </a:p>
+          <a:p>
+            <a:pPr>
+              <a:spcAft>
+                <a:spcPts val="1500"/>
+              </a:spcAft>
+              <a:defRPr sz="1800">
+                <a:solidFill>
+                  <a:srgbClr val="302A32"/>
+                </a:solidFill>
+              </a:defRPr>
+            </a:pPr>
+            <a:r>
+              <a:t>mT5 LoRA: 344,064 parameters updated; validation loss 11.42 to 1.034.</a:t>
+            </a:r>
+          </a:p>
+          <a:p>
+            <a:pPr>
+              <a:spcAft>
+                <a:spcPts val="1500"/>
+              </a:spcAft>
+              <a:defRPr sz="1800">
+                <a:solidFill>
+                  <a:srgbClr val="302A32"/>
+                </a:solidFill>
+              </a:defRPr>
+            </a:pPr>
+            <a:r>
+              <a:t>Held-out topics: ROUGE-L 0.0050 to 0.4862; evidence overlap 0.0729 to 0.6687.</a:t>
+            </a:r>
+          </a:p>
+          <a:p>
+            <a:pPr>
+              <a:spcAft>
+                <a:spcPts val="1500"/>
+              </a:spcAft>
+              <a:defRPr sz="1800">
+                <a:solidFill>
+                  <a:srgbClr val="302A32"/>
+                </a:solidFill>
+              </a:defRPr>
+            </a:pPr>
+            <a:r>
+              <a:t>Topic model: 238 labelled representations, 14 classes; controlled Top-3 accuracy 96.43%.</a:t>
+            </a:r>
+          </a:p>
+          <a:p>
+            <a:pPr>
+              <a:spcAft>
+                <a:spcPts val="1500"/>
+              </a:spcAft>
+              <a:defRPr sz="1800">
+                <a:solidFill>
+                  <a:srgbClr val="302A32"/>
+                </a:solidFill>
+              </a:defRPr>
+            </a:pPr>
+            <a:r>
+              <a:t>Gemini is externally hosted and not claimed as project fine-tuning.</a:t>
+            </a:r>
+          </a:p>
+          <a:p>
+            <a:pPr>
+              <a:spcAft>
+                <a:spcPts val="1500"/>
+              </a:spcAft>
+              <a:defRPr sz="1800">
+                <a:solidFill>
+                  <a:srgbClr val="302A32"/>
+                </a:solidFill>
+              </a:defRPr>
+            </a:pPr>
+            <a:r>
+              <a:t>Ollama remains optional and prompt-configured; it is not project fine-tuning.</a:t>
+            </a:r>
+          </a:p>
+        </p:txBody>
+      </p:sp>
+      <p:pic>
+        <p:nvPicPr>
+          <p:cNvPr id="4" name="Picture 3" descr="generator_training_and_test.png"/>
+          <p:cNvPicPr>
+            <a:picLocks noChangeAspect="1"/>
+          </p:cNvPicPr>
+          <p:nvPr/>
+        </p:nvPicPr>
+        <p:blipFill>
+          <a:blip r:embed="rId2"/>
+          <a:stretch>
+            <a:fillRect/>
+          </a:stretch>
+        </p:blipFill>
+        <p:spPr>
+          <a:xfrm>
+            <a:off x="6446520" y="1508760"/>
+            <a:ext cx="5257800" cy="1937601"/>
+          </a:xfrm>
+          <a:prstGeom prst="rect">
+            <a:avLst/>
+          </a:prstGeom>
+        </p:spPr>
+      </p:pic>
     </p:spTree>
   </p:cSld>
   <p:clrMapOvr>
@@ -3634,7 +3718,37 @@
               </a:defRPr>
             </a:pPr>
             <a:r>
-              <a:t>Kinyarwanda passages require native-speaker and maternal-health review.</a:t>
+              <a:t>Strict local gate: English 9/12 accepted; Kinyarwanda 0/12, so grounded Gemini handles RW.</a:t>
+            </a:r>
+          </a:p>
+          <a:p>
+            <a:pPr>
+              <a:spcAft>
+                <a:spcPts val="1500"/>
+              </a:spcAft>
+              <a:defRPr sz="2000">
+                <a:solidFill>
+                  <a:srgbClr val="302A32"/>
+                </a:solidFill>
+              </a:defRPr>
+            </a:pPr>
+            <a:r>
+              <a:t>If Gemini is absent, times out or fails validation, the RW source passage is returned.</a:t>
+            </a:r>
+          </a:p>
+          <a:p>
+            <a:pPr>
+              <a:spcAft>
+                <a:spcPts val="1500"/>
+              </a:spcAft>
+              <a:defRPr sz="2000">
+                <a:solidFill>
+                  <a:srgbClr val="302A32"/>
+                </a:solidFill>
+              </a:defRPr>
+            </a:pPr>
+            <a:r>
+              <a:t>Topic Top-1 85.71% still exposes ambiguity; Top-3 evidence selection reached 96.43%.</a:t>
             </a:r>
           </a:p>
           <a:p>
@@ -3823,7 +3937,7 @@
               </a:defRPr>
             </a:pPr>
             <a:r>
-              <a:t>Create a reviewed bilingual conversation corpus before LoRA/QLoRA fine-tuning.</a:t>
+              <a:t>Create a larger reviewed bilingual corpus for a stronger second fine-tuning experiment.</a:t>
             </a:r>
           </a:p>
           <a:p>
@@ -4002,7 +4116,7 @@
               </a:defRPr>
             </a:pPr>
             <a:r>
-              <a:t>Live demonstration: bilingual reformulation • check-in • safety • fallback.</a:t>
+              <a:t>Live demonstration: trained topic selection • grounded Gemini • mT5 fallback • check-in • safety.</a:t>
             </a:r>
           </a:p>
         </p:txBody>

--- a/Umubyeyi_Presentation.pptx
+++ b/Umubyeyi_Presentation.pptx
@@ -19,6 +19,7 @@
     <p:sldId id="267" r:id="rId18"/>
     <p:sldId id="268" r:id="rId19"/>
     <p:sldId id="269" r:id="rId20"/>
+    <p:sldId id="270" r:id="rId21"/>
   </p:sldIdLst>
   <p:sldSz cx="12191695" cy="6858000" type="screen4x3"/>
   <p:notesSz cx="6858000" cy="9144000"/>
@@ -3224,6 +3225,91 @@
               </a:defRPr>
             </a:pPr>
             <a:r>
+              <a:t>8. Current system architecture</a:t>
+            </a:r>
+          </a:p>
+        </p:txBody>
+      </p:sp>
+      <p:pic>
+        <p:nvPicPr>
+          <p:cNvPr id="3" name="Picture 2" descr="system_architecture_layered.png"/>
+          <p:cNvPicPr>
+            <a:picLocks noChangeAspect="1"/>
+          </p:cNvPicPr>
+          <p:nvPr/>
+        </p:nvPicPr>
+        <p:blipFill>
+          <a:blip r:embed="rId2"/>
+          <a:stretch>
+            <a:fillRect/>
+          </a:stretch>
+        </p:blipFill>
+        <p:spPr>
+          <a:xfrm>
+            <a:off x="502920" y="1143000"/>
+            <a:ext cx="11201400" cy="6266052"/>
+          </a:xfrm>
+          <a:prstGeom prst="rect">
+            <a:avLst/>
+          </a:prstGeom>
+        </p:spPr>
+      </p:pic>
+    </p:spTree>
+  </p:cSld>
+  <p:clrMapOvr>
+    <a:masterClrMapping/>
+  </p:clrMapOvr>
+</p:sld>
+</file>
+
+<file path=ppt/slides/slide11.xml><?xml version="1.0" encoding="utf-8"?>
+<p:sld xmlns:a="http://schemas.openxmlformats.org/drawingml/2006/main" xmlns:p="http://schemas.openxmlformats.org/presentationml/2006/main" xmlns:r="http://schemas.openxmlformats.org/officeDocument/2006/relationships">
+  <p:cSld>
+    <p:bg>
+      <p:bgPr>
+        <a:solidFill>
+          <a:srgbClr val="F8F1E8"/>
+        </a:solidFill>
+        <a:effectLst/>
+      </p:bgPr>
+    </p:bg>
+    <p:spTree>
+      <p:nvGrpSpPr>
+        <p:cNvPr id="1" name=""/>
+        <p:cNvGrpSpPr/>
+        <p:nvPr/>
+      </p:nvGrpSpPr>
+      <p:grpSpPr/>
+      <p:sp>
+        <p:nvSpPr>
+          <p:cNvPr id="2" name="TextBox 1"/>
+          <p:cNvSpPr txBox="1"/>
+          <p:nvPr/>
+        </p:nvSpPr>
+        <p:spPr>
+          <a:xfrm>
+            <a:off x="594360" y="320040"/>
+            <a:ext cx="10972800" cy="640080"/>
+          </a:xfrm>
+          <a:prstGeom prst="rect">
+            <a:avLst/>
+          </a:prstGeom>
+          <a:noFill/>
+        </p:spPr>
+        <p:txBody>
+          <a:bodyPr wrap="none">
+            <a:spAutoFit/>
+          </a:bodyPr>
+          <a:lstStyle/>
+          <a:p>
+            <a:pPr>
+              <a:defRPr sz="2700" b="1">
+                <a:solidFill>
+                  <a:srgbClr val="302A32"/>
+                </a:solidFill>
+              </a:defRPr>
+            </a:pPr>
+            <a:r>
               <a:t>9. Functional and testing evidence</a:t>
             </a:r>
           </a:p>
@@ -3262,7 +3348,7 @@
               </a:defRPr>
             </a:pPr>
             <a:r>
-              <a:t>66 automated tests: unit, boundary, invalid-input, offline, HTTP, safety and evaluation integrity.</a:t>
+              <a:t>67 automated tests: unit, boundary, invalid-input, offline, HTTP, safety and evaluation integrity.</a:t>
             </a:r>
           </a:p>
           <a:p>
@@ -3292,7 +3378,7 @@
               </a:defRPr>
             </a:pPr>
             <a:r>
-              <a:t>Trained topic classifier: Top-1 85.71%, Top-3 96.43%, macro-F1 85.99% on 28 controlled cases.</a:t>
+              <a:t>Trained six-class bilingual intent classifier: English Top-1 74.44%, Top-3 97.78%; Kinyarwanda Top-1 42.22%, Top-3 72.22% (90 controlled cases per language).</a:t>
             </a:r>
           </a:p>
           <a:p>
@@ -3389,219 +3475,6 @@
 </p:sld>
 </file>
 
-<file path=ppt/slides/slide11.xml><?xml version="1.0" encoding="utf-8"?>
-<p:sld xmlns:a="http://schemas.openxmlformats.org/drawingml/2006/main" xmlns:p="http://schemas.openxmlformats.org/presentationml/2006/main" xmlns:r="http://schemas.openxmlformats.org/officeDocument/2006/relationships">
-  <p:cSld>
-    <p:bg>
-      <p:bgPr>
-        <a:solidFill>
-          <a:srgbClr val="F8F1E8"/>
-        </a:solidFill>
-        <a:effectLst/>
-      </p:bgPr>
-    </p:bg>
-    <p:spTree>
-      <p:nvGrpSpPr>
-        <p:cNvPr id="1" name=""/>
-        <p:cNvGrpSpPr/>
-        <p:nvPr/>
-      </p:nvGrpSpPr>
-      <p:grpSpPr/>
-      <p:sp>
-        <p:nvSpPr>
-          <p:cNvPr id="2" name="TextBox 1"/>
-          <p:cNvSpPr txBox="1"/>
-          <p:nvPr/>
-        </p:nvSpPr>
-        <p:spPr>
-          <a:xfrm>
-            <a:off x="594360" y="320040"/>
-            <a:ext cx="10972800" cy="640080"/>
-          </a:xfrm>
-          <a:prstGeom prst="rect">
-            <a:avLst/>
-          </a:prstGeom>
-          <a:noFill/>
-        </p:spPr>
-        <p:txBody>
-          <a:bodyPr wrap="none">
-            <a:spAutoFit/>
-          </a:bodyPr>
-          <a:lstStyle/>
-          <a:p>
-            <a:pPr>
-              <a:defRPr sz="2700" b="1">
-                <a:solidFill>
-                  <a:srgbClr val="302A32"/>
-                </a:solidFill>
-              </a:defRPr>
-            </a:pPr>
-            <a:r>
-              <a:t>10. What was trained—and what was not</a:t>
-            </a:r>
-          </a:p>
-        </p:txBody>
-      </p:sp>
-      <p:sp>
-        <p:nvSpPr>
-          <p:cNvPr id="3" name="TextBox 2"/>
-          <p:cNvSpPr txBox="1"/>
-          <p:nvPr/>
-        </p:nvSpPr>
-        <p:spPr>
-          <a:xfrm>
-            <a:off x="731520" y="1508760"/>
-            <a:ext cx="5486400" cy="4709160"/>
-          </a:xfrm>
-          <a:prstGeom prst="rect">
-            <a:avLst/>
-          </a:prstGeom>
-          <a:noFill/>
-        </p:spPr>
-        <p:txBody>
-          <a:bodyPr wrap="none">
-            <a:spAutoFit/>
-          </a:bodyPr>
-          <a:lstStyle/>
-          <a:p>
-            <a:pPr>
-              <a:spcAft>
-                <a:spcPts val="1500"/>
-              </a:spcAft>
-              <a:defRPr sz="1800">
-                <a:solidFill>
-                  <a:srgbClr val="302A32"/>
-                </a:solidFill>
-              </a:defRPr>
-            </a:pPr>
-            <a:r>
-              <a:t>Trained here: two screening experiments, bilingual topic classification, and mT5 LoRA generation.</a:t>
-            </a:r>
-          </a:p>
-          <a:p>
-            <a:pPr>
-              <a:spcAft>
-                <a:spcPts val="1500"/>
-              </a:spcAft>
-              <a:defRPr sz="1800">
-                <a:solidFill>
-                  <a:srgbClr val="302A32"/>
-                </a:solidFill>
-              </a:defRPr>
-            </a:pPr>
-            <a:r>
-              <a:t>Built here: preprocessing, retrieval, safety policy, grounded Gemini integration, OOP services and interface.</a:t>
-            </a:r>
-          </a:p>
-          <a:p>
-            <a:pPr>
-              <a:spcAft>
-                <a:spcPts val="1500"/>
-              </a:spcAft>
-              <a:defRPr sz="1800">
-                <a:solidFill>
-                  <a:srgbClr val="302A32"/>
-                </a:solidFill>
-              </a:defRPr>
-            </a:pPr>
-            <a:r>
-              <a:t>mT5 LoRA: 344,064 parameters updated; validation loss 11.42 to 1.034.</a:t>
-            </a:r>
-          </a:p>
-          <a:p>
-            <a:pPr>
-              <a:spcAft>
-                <a:spcPts val="1500"/>
-              </a:spcAft>
-              <a:defRPr sz="1800">
-                <a:solidFill>
-                  <a:srgbClr val="302A32"/>
-                </a:solidFill>
-              </a:defRPr>
-            </a:pPr>
-            <a:r>
-              <a:t>Held-out topics: ROUGE-L 0.0050 to 0.4862; evidence overlap 0.0729 to 0.6687.</a:t>
-            </a:r>
-          </a:p>
-          <a:p>
-            <a:pPr>
-              <a:spcAft>
-                <a:spcPts val="1500"/>
-              </a:spcAft>
-              <a:defRPr sz="1800">
-                <a:solidFill>
-                  <a:srgbClr val="302A32"/>
-                </a:solidFill>
-              </a:defRPr>
-            </a:pPr>
-            <a:r>
-              <a:t>Topic model: 238 labelled representations, 14 classes; controlled Top-3 accuracy 96.43%.</a:t>
-            </a:r>
-          </a:p>
-          <a:p>
-            <a:pPr>
-              <a:spcAft>
-                <a:spcPts val="1500"/>
-              </a:spcAft>
-              <a:defRPr sz="1800">
-                <a:solidFill>
-                  <a:srgbClr val="302A32"/>
-                </a:solidFill>
-              </a:defRPr>
-            </a:pPr>
-            <a:r>
-              <a:t>Gemini is externally hosted and not claimed as project fine-tuning.</a:t>
-            </a:r>
-          </a:p>
-          <a:p>
-            <a:pPr>
-              <a:spcAft>
-                <a:spcPts val="1500"/>
-              </a:spcAft>
-              <a:defRPr sz="1800">
-                <a:solidFill>
-                  <a:srgbClr val="302A32"/>
-                </a:solidFill>
-              </a:defRPr>
-            </a:pPr>
-            <a:r>
-              <a:t>Ollama remains optional and prompt-configured; it is not project fine-tuning.</a:t>
-            </a:r>
-          </a:p>
-        </p:txBody>
-      </p:sp>
-      <p:pic>
-        <p:nvPicPr>
-          <p:cNvPr id="4" name="Picture 3" descr="generator_training_and_test.png"/>
-          <p:cNvPicPr>
-            <a:picLocks noChangeAspect="1"/>
-          </p:cNvPicPr>
-          <p:nvPr/>
-        </p:nvPicPr>
-        <p:blipFill>
-          <a:blip r:embed="rId2"/>
-          <a:stretch>
-            <a:fillRect/>
-          </a:stretch>
-        </p:blipFill>
-        <p:spPr>
-          <a:xfrm>
-            <a:off x="6446520" y="1508760"/>
-            <a:ext cx="5257800" cy="1937601"/>
-          </a:xfrm>
-          <a:prstGeom prst="rect">
-            <a:avLst/>
-          </a:prstGeom>
-        </p:spPr>
-      </p:pic>
-    </p:spTree>
-  </p:cSld>
-  <p:clrMapOvr>
-    <a:masterClrMapping/>
-  </p:clrMapOvr>
-</p:sld>
-</file>
-
 <file path=ppt/slides/slide12.xml><?xml version="1.0" encoding="utf-8"?>
 <p:sld xmlns:a="http://schemas.openxmlformats.org/drawingml/2006/main" xmlns:p="http://schemas.openxmlformats.org/presentationml/2006/main" xmlns:r="http://schemas.openxmlformats.org/officeDocument/2006/relationships">
   <p:cSld>
@@ -3650,7 +3523,7 @@
               </a:defRPr>
             </a:pPr>
             <a:r>
-              <a:t>11. Results, limitations and real-world validity</a:t>
+              <a:t>10. What was trained—and what was not</a:t>
             </a:r>
           </a:p>
         </p:txBody>
@@ -3664,7 +3537,7 @@
         <p:spPr>
           <a:xfrm>
             <a:off x="731520" y="1508760"/>
-            <a:ext cx="10698480" cy="4709160"/>
+            <a:ext cx="5486400" cy="4709160"/>
           </a:xfrm>
           <a:prstGeom prst="rect">
             <a:avLst/>
@@ -3681,108 +3554,132 @@
               <a:spcAft>
                 <a:spcPts val="1500"/>
               </a:spcAft>
-              <a:defRPr sz="2000">
-                <a:solidFill>
-                  <a:srgbClr val="302A32"/>
-                </a:solidFill>
-              </a:defRPr>
-            </a:pPr>
-            <a:r>
-              <a:t>Technically functioning prototype with held-out model evaluation and reproducible evidence.</a:t>
-            </a:r>
-          </a:p>
-          <a:p>
-            <a:pPr>
-              <a:spcAft>
-                <a:spcPts val="1500"/>
-              </a:spcAft>
-              <a:defRPr sz="2000">
-                <a:solidFill>
-                  <a:srgbClr val="302A32"/>
-                </a:solidFill>
-              </a:defRPr>
-            </a:pPr>
-            <a:r>
-              <a:t>No clinical diagnosis, calibration or validation for Rwanda is claimed.</a:t>
-            </a:r>
-          </a:p>
-          <a:p>
-            <a:pPr>
-              <a:spcAft>
-                <a:spcPts val="1500"/>
-              </a:spcAft>
-              <a:defRPr sz="2000">
-                <a:solidFill>
-                  <a:srgbClr val="302A32"/>
-                </a:solidFill>
-              </a:defRPr>
-            </a:pPr>
-            <a:r>
-              <a:t>Strict local gate: English 9/12 accepted; Kinyarwanda 0/12, so grounded Gemini handles RW.</a:t>
-            </a:r>
-          </a:p>
-          <a:p>
-            <a:pPr>
-              <a:spcAft>
-                <a:spcPts val="1500"/>
-              </a:spcAft>
-              <a:defRPr sz="2000">
-                <a:solidFill>
-                  <a:srgbClr val="302A32"/>
-                </a:solidFill>
-              </a:defRPr>
-            </a:pPr>
-            <a:r>
-              <a:t>If Gemini is absent, times out or fails validation, the RW source passage is returned.</a:t>
-            </a:r>
-          </a:p>
-          <a:p>
-            <a:pPr>
-              <a:spcAft>
-                <a:spcPts val="1500"/>
-              </a:spcAft>
-              <a:defRPr sz="2000">
-                <a:solidFill>
-                  <a:srgbClr val="302A32"/>
-                </a:solidFill>
-              </a:defRPr>
-            </a:pPr>
-            <a:r>
-              <a:t>Topic Top-1 85.71% still exposes ambiguity; Top-3 evidence selection reached 96.43%.</a:t>
-            </a:r>
-          </a:p>
-          <a:p>
-            <a:pPr>
-              <a:spcAft>
-                <a:spcPts val="1500"/>
-              </a:spcAft>
-              <a:defRPr sz="2000">
-                <a:solidFill>
-                  <a:srgbClr val="302A32"/>
-                </a:solidFill>
-              </a:defRPr>
-            </a:pPr>
-            <a:r>
-              <a:t>No formal field study with postpartum mothers has yet been completed.</a:t>
-            </a:r>
-          </a:p>
-          <a:p>
-            <a:pPr>
-              <a:spcAft>
-                <a:spcPts val="1500"/>
-              </a:spcAft>
-              <a:defRPr sz="2000">
-                <a:solidFill>
-                  <a:srgbClr val="302A32"/>
-                </a:solidFill>
-              </a:defRPr>
-            </a:pPr>
-            <a:r>
-              <a:t>Safety rules and retrieval reduce risk but do not replace professional support.</a:t>
-            </a:r>
-          </a:p>
-        </p:txBody>
-      </p:sp>
+              <a:defRPr sz="1800">
+                <a:solidFill>
+                  <a:srgbClr val="302A32"/>
+                </a:solidFill>
+              </a:defRPr>
+            </a:pPr>
+            <a:r>
+              <a:t>Trained here: two screening experiments, bilingual intent classification, and two LoRA generators.</a:t>
+            </a:r>
+          </a:p>
+          <a:p>
+            <a:pPr>
+              <a:spcAft>
+                <a:spcPts val="1500"/>
+              </a:spcAft>
+              <a:defRPr sz="1800">
+                <a:solidFill>
+                  <a:srgbClr val="302A32"/>
+                </a:solidFill>
+              </a:defRPr>
+            </a:pPr>
+            <a:r>
+              <a:t>Built here: preprocessing, retrieval, safety policy, grounded Gemini integration, OOP services and interface.</a:t>
+            </a:r>
+          </a:p>
+          <a:p>
+            <a:pPr>
+              <a:spcAft>
+                <a:spcPts val="1500"/>
+              </a:spcAft>
+              <a:defRPr sz="1800">
+                <a:solidFill>
+                  <a:srgbClr val="302A32"/>
+                </a:solidFill>
+              </a:defRPr>
+            </a:pPr>
+            <a:r>
+              <a:t>mT5-small LoRA (deployed): 344,064 parameters updated; validation loss 4.36 to 4.18 over 3 epochs.</a:t>
+            </a:r>
+          </a:p>
+          <a:p>
+            <a:pPr>
+              <a:spcAft>
+                <a:spcPts val="1500"/>
+              </a:spcAft>
+              <a:defRPr sz="1800">
+                <a:solidFill>
+                  <a:srgbClr val="302A32"/>
+                </a:solidFill>
+              </a:defRPr>
+            </a:pPr>
+            <a:r>
+              <a:t>flan-T5-small LoRA (comparison only, not deployed): same LoRA config; validation loss 2.95 to 2.92.</a:t>
+            </a:r>
+          </a:p>
+          <a:p>
+            <a:pPr>
+              <a:spcAft>
+                <a:spcPts val="1500"/>
+              </a:spcAft>
+              <a:defRPr sz="1800">
+                <a:solidFill>
+                  <a:srgbClr val="302A32"/>
+                </a:solidFill>
+              </a:defRPr>
+            </a:pPr>
+            <a:r>
+              <a:t>Held-out ESConv cases (100): ROUGE-L 0.000 to 0.115 (mT5-small), 0.103 to 0.142 (flan-T5-small).</a:t>
+            </a:r>
+          </a:p>
+          <a:p>
+            <a:pPr>
+              <a:spcAft>
+                <a:spcPts val="1500"/>
+              </a:spcAft>
+              <a:defRPr sz="1800">
+                <a:solidFill>
+                  <a:srgbClr val="302A32"/>
+                </a:solidFill>
+              </a:defRPr>
+            </a:pPr>
+            <a:r>
+              <a:t>7,795 real ESConv conversation examples used; AMOD returned 0 rows this run (HF gated-license fetch).</a:t>
+            </a:r>
+          </a:p>
+          <a:p>
+            <a:pPr>
+              <a:spcAft>
+                <a:spcPts val="1500"/>
+              </a:spcAft>
+              <a:defRPr sz="1800">
+                <a:solidFill>
+                  <a:srgbClr val="302A32"/>
+                </a:solidFill>
+              </a:defRPr>
+            </a:pPr>
+            <a:r>
+              <a:t>Gemini is externally hosted and not claimed as project fine-tuning.</a:t>
+            </a:r>
+          </a:p>
+        </p:txBody>
+      </p:sp>
+      <p:pic>
+        <p:nvPicPr>
+          <p:cNvPr id="4" name="Picture 3" descr="generator_training_and_test.png"/>
+          <p:cNvPicPr>
+            <a:picLocks noChangeAspect="1"/>
+          </p:cNvPicPr>
+          <p:nvPr/>
+        </p:nvPicPr>
+        <p:blipFill>
+          <a:blip r:embed="rId2"/>
+          <a:stretch>
+            <a:fillRect/>
+          </a:stretch>
+        </p:blipFill>
+        <p:spPr>
+          <a:xfrm>
+            <a:off x="6446520" y="1508760"/>
+            <a:ext cx="5257800" cy="1941729"/>
+          </a:xfrm>
+          <a:prstGeom prst="rect">
+            <a:avLst/>
+          </a:prstGeom>
+        </p:spPr>
+      </p:pic>
     </p:spTree>
   </p:cSld>
   <p:clrMapOvr>
@@ -3839,7 +3736,7 @@
               </a:defRPr>
             </a:pPr>
             <a:r>
-              <a:t>12. Recommendations and impact</a:t>
+              <a:t>11. Results, limitations and real-world validity</a:t>
             </a:r>
           </a:p>
         </p:txBody>
@@ -3877,7 +3774,7 @@
               </a:defRPr>
             </a:pPr>
             <a:r>
-              <a:t>Collect Rwanda-specific data through an ethically approved study.</a:t>
+              <a:t>Technically functioning prototype with held-out model evaluation and reproducible evidence.</a:t>
             </a:r>
           </a:p>
           <a:p>
@@ -3892,7 +3789,7 @@
               </a:defRPr>
             </a:pPr>
             <a:r>
-              <a:t>Conduct native-speaker, health-professional and usability review.</a:t>
+              <a:t>No clinical diagnosis, calibration or validation for Rwanda is claimed.</a:t>
             </a:r>
           </a:p>
           <a:p>
@@ -3907,7 +3804,7 @@
               </a:defRPr>
             </a:pPr>
             <a:r>
-              <a:t>Compare multilingual semantic embeddings with character TF-IDF.</a:t>
+              <a:t>Both fine-tuned generators are English-only; Kinyarwanda always routes to grounded Gemini or retrieval.</a:t>
             </a:r>
           </a:p>
           <a:p>
@@ -3922,7 +3819,7 @@
               </a:defRPr>
             </a:pPr>
             <a:r>
-              <a:t>Evaluate calibration, fairness, false-negative risk and resource usage.</a:t>
+              <a:t>If Gemini is absent, times out or fails validation, the RW source passage is returned.</a:t>
             </a:r>
           </a:p>
           <a:p>
@@ -3937,7 +3834,7 @@
               </a:defRPr>
             </a:pPr>
             <a:r>
-              <a:t>Create a larger reviewed bilingual corpus for a stronger second fine-tuning experiment.</a:t>
+              <a:t>Intent Top-1 74.44% (English) still exposes ambiguity; Top-3 reaches 97.78%.</a:t>
             </a:r>
           </a:p>
           <a:p>
@@ -3952,7 +3849,22 @@
               </a:defRPr>
             </a:pPr>
             <a:r>
-              <a:t>Impact: a transparent foundation for safe, locally operated maternal-support research.</a:t>
+              <a:t>No formal field study with postpartum mothers has yet been completed.</a:t>
+            </a:r>
+          </a:p>
+          <a:p>
+            <a:pPr>
+              <a:spcAft>
+                <a:spcPts val="1500"/>
+              </a:spcAft>
+              <a:defRPr sz="2000">
+                <a:solidFill>
+                  <a:srgbClr val="302A32"/>
+                </a:solidFill>
+              </a:defRPr>
+            </a:pPr>
+            <a:r>
+              <a:t>Safety rules and retrieval reduce risk but do not replace professional support.</a:t>
             </a:r>
           </a:p>
         </p:txBody>
@@ -4013,6 +3925,180 @@
               </a:defRPr>
             </a:pPr>
             <a:r>
+              <a:t>12. Recommendations and impact</a:t>
+            </a:r>
+          </a:p>
+        </p:txBody>
+      </p:sp>
+      <p:sp>
+        <p:nvSpPr>
+          <p:cNvPr id="3" name="TextBox 2"/>
+          <p:cNvSpPr txBox="1"/>
+          <p:nvPr/>
+        </p:nvSpPr>
+        <p:spPr>
+          <a:xfrm>
+            <a:off x="731520" y="1508760"/>
+            <a:ext cx="10698480" cy="4709160"/>
+          </a:xfrm>
+          <a:prstGeom prst="rect">
+            <a:avLst/>
+          </a:prstGeom>
+          <a:noFill/>
+        </p:spPr>
+        <p:txBody>
+          <a:bodyPr wrap="none">
+            <a:spAutoFit/>
+          </a:bodyPr>
+          <a:lstStyle/>
+          <a:p>
+            <a:pPr>
+              <a:spcAft>
+                <a:spcPts val="1500"/>
+              </a:spcAft>
+              <a:defRPr sz="2000">
+                <a:solidFill>
+                  <a:srgbClr val="302A32"/>
+                </a:solidFill>
+              </a:defRPr>
+            </a:pPr>
+            <a:r>
+              <a:t>Collect Rwanda-specific data through an ethically approved study.</a:t>
+            </a:r>
+          </a:p>
+          <a:p>
+            <a:pPr>
+              <a:spcAft>
+                <a:spcPts val="1500"/>
+              </a:spcAft>
+              <a:defRPr sz="2000">
+                <a:solidFill>
+                  <a:srgbClr val="302A32"/>
+                </a:solidFill>
+              </a:defRPr>
+            </a:pPr>
+            <a:r>
+              <a:t>Conduct native-speaker, health-professional and usability review.</a:t>
+            </a:r>
+          </a:p>
+          <a:p>
+            <a:pPr>
+              <a:spcAft>
+                <a:spcPts val="1500"/>
+              </a:spcAft>
+              <a:defRPr sz="2000">
+                <a:solidFill>
+                  <a:srgbClr val="302A32"/>
+                </a:solidFill>
+              </a:defRPr>
+            </a:pPr>
+            <a:r>
+              <a:t>Compare multilingual semantic embeddings with character TF-IDF.</a:t>
+            </a:r>
+          </a:p>
+          <a:p>
+            <a:pPr>
+              <a:spcAft>
+                <a:spcPts val="1500"/>
+              </a:spcAft>
+              <a:defRPr sz="2000">
+                <a:solidFill>
+                  <a:srgbClr val="302A32"/>
+                </a:solidFill>
+              </a:defRPr>
+            </a:pPr>
+            <a:r>
+              <a:t>Evaluate calibration, fairness, false-negative risk and resource usage.</a:t>
+            </a:r>
+          </a:p>
+          <a:p>
+            <a:pPr>
+              <a:spcAft>
+                <a:spcPts val="1500"/>
+              </a:spcAft>
+              <a:defRPr sz="2000">
+                <a:solidFill>
+                  <a:srgbClr val="302A32"/>
+                </a:solidFill>
+              </a:defRPr>
+            </a:pPr>
+            <a:r>
+              <a:t>Create a larger reviewed bilingual corpus for a stronger second fine-tuning experiment.</a:t>
+            </a:r>
+          </a:p>
+          <a:p>
+            <a:pPr>
+              <a:spcAft>
+                <a:spcPts val="1500"/>
+              </a:spcAft>
+              <a:defRPr sz="2000">
+                <a:solidFill>
+                  <a:srgbClr val="302A32"/>
+                </a:solidFill>
+              </a:defRPr>
+            </a:pPr>
+            <a:r>
+              <a:t>Impact: a transparent foundation for safe, locally operated maternal-support research.</a:t>
+            </a:r>
+          </a:p>
+        </p:txBody>
+      </p:sp>
+    </p:spTree>
+  </p:cSld>
+  <p:clrMapOvr>
+    <a:masterClrMapping/>
+  </p:clrMapOvr>
+</p:sld>
+</file>
+
+<file path=ppt/slides/slide15.xml><?xml version="1.0" encoding="utf-8"?>
+<p:sld xmlns:a="http://schemas.openxmlformats.org/drawingml/2006/main" xmlns:p="http://schemas.openxmlformats.org/presentationml/2006/main" xmlns:r="http://schemas.openxmlformats.org/officeDocument/2006/relationships">
+  <p:cSld>
+    <p:bg>
+      <p:bgPr>
+        <a:solidFill>
+          <a:srgbClr val="F8F1E8"/>
+        </a:solidFill>
+        <a:effectLst/>
+      </p:bgPr>
+    </p:bg>
+    <p:spTree>
+      <p:nvGrpSpPr>
+        <p:cNvPr id="1" name=""/>
+        <p:cNvGrpSpPr/>
+        <p:nvPr/>
+      </p:nvGrpSpPr>
+      <p:grpSpPr/>
+      <p:sp>
+        <p:nvSpPr>
+          <p:cNvPr id="2" name="TextBox 1"/>
+          <p:cNvSpPr txBox="1"/>
+          <p:nvPr/>
+        </p:nvSpPr>
+        <p:spPr>
+          <a:xfrm>
+            <a:off x="594360" y="320040"/>
+            <a:ext cx="10972800" cy="640080"/>
+          </a:xfrm>
+          <a:prstGeom prst="rect">
+            <a:avLst/>
+          </a:prstGeom>
+          <a:noFill/>
+        </p:spPr>
+        <p:txBody>
+          <a:bodyPr wrap="none">
+            <a:spAutoFit/>
+          </a:bodyPr>
+          <a:lstStyle/>
+          <a:p>
+            <a:pPr>
+              <a:defRPr sz="2700" b="1">
+                <a:solidFill>
+                  <a:srgbClr val="302A32"/>
+                </a:solidFill>
+              </a:defRPr>
+            </a:pPr>
+            <a:r>
               <a:t>Thank you — questions</a:t>
             </a:r>
           </a:p>
@@ -4177,7 +4263,7 @@
               </a:defRPr>
             </a:pPr>
             <a:r>
-              <a:t>1. Problem and intended user</a:t>
+              <a:t>Outline</a:t>
             </a:r>
           </a:p>
         </p:txBody>
@@ -4215,7 +4301,52 @@
               </a:defRPr>
             </a:pPr>
             <a:r>
-              <a:t>The first months after childbirth can involve sadness, anxiety, guilt, isolation and exhaustion.</a:t>
+              <a:t>Introduction</a:t>
+            </a:r>
+          </a:p>
+          <a:p>
+            <a:pPr lvl="1">
+              <a:spcAft>
+                <a:spcPts val="600"/>
+              </a:spcAft>
+              <a:defRPr sz="1600">
+                <a:solidFill>
+                  <a:srgbClr val="716874"/>
+                </a:solidFill>
+              </a:defRPr>
+            </a:pPr>
+            <a:r>
+              <a:t>Problem and intended user</a:t>
+            </a:r>
+          </a:p>
+          <a:p>
+            <a:pPr lvl="1">
+              <a:spcAft>
+                <a:spcPts val="600"/>
+              </a:spcAft>
+              <a:defRPr sz="1600">
+                <a:solidFill>
+                  <a:srgbClr val="716874"/>
+                </a:solidFill>
+              </a:defRPr>
+            </a:pPr>
+            <a:r>
+              <a:t>Literature synthesis and gap</a:t>
+            </a:r>
+          </a:p>
+          <a:p>
+            <a:pPr lvl="1">
+              <a:spcAft>
+                <a:spcPts val="600"/>
+              </a:spcAft>
+              <a:defRPr sz="1600">
+                <a:solidFill>
+                  <a:srgbClr val="716874"/>
+                </a:solidFill>
+              </a:defRPr>
+            </a:pPr>
+            <a:r>
+              <a:t>Objectives and strict scope</a:t>
             </a:r>
           </a:p>
           <a:p>
@@ -4230,7 +4361,22 @@
               </a:defRPr>
             </a:pPr>
             <a:r>
-              <a:t>Kinyarwanda-speaking mothers have limited access to culturally reviewed digital support.</a:t>
+              <a:t>Data</a:t>
+            </a:r>
+          </a:p>
+          <a:p>
+            <a:pPr lvl="1">
+              <a:spcAft>
+                <a:spcPts val="600"/>
+              </a:spcAft>
+              <a:defRPr sz="1600">
+                <a:solidFill>
+                  <a:srgbClr val="716874"/>
+                </a:solidFill>
+              </a:defRPr>
+            </a:pPr>
+            <a:r>
+              <a:t>Dataset and target</a:t>
             </a:r>
           </a:p>
           <a:p>
@@ -4245,7 +4391,52 @@
               </a:defRPr>
             </a:pPr>
             <a:r>
-              <a:t>The assistant must support the mother while refusing diagnosis, emergency care and unrelated requests.</a:t>
+              <a:t>Methodology</a:t>
+            </a:r>
+          </a:p>
+          <a:p>
+            <a:pPr lvl="1">
+              <a:spcAft>
+                <a:spcPts val="600"/>
+              </a:spcAft>
+              <a:defRPr sz="1600">
+                <a:solidFill>
+                  <a:srgbClr val="716874"/>
+                </a:solidFill>
+              </a:defRPr>
+            </a:pPr>
+            <a:r>
+              <a:t>Model selection and full-model results</a:t>
+            </a:r>
+          </a:p>
+          <a:p>
+            <a:pPr lvl="1">
+              <a:spcAft>
+                <a:spcPts val="600"/>
+              </a:spcAft>
+              <a:defRPr sz="1600">
+                <a:solidFill>
+                  <a:srgbClr val="716874"/>
+                </a:solidFill>
+              </a:defRPr>
+            </a:pPr>
+            <a:r>
+              <a:t>Practical guided check-in</a:t>
+            </a:r>
+          </a:p>
+          <a:p>
+            <a:pPr lvl="1">
+              <a:spcAft>
+                <a:spcPts val="600"/>
+              </a:spcAft>
+              <a:defRPr sz="1600">
+                <a:solidFill>
+                  <a:srgbClr val="716874"/>
+                </a:solidFill>
+              </a:defRPr>
+            </a:pPr>
+            <a:r>
+              <a:t>Current system architecture</a:t>
             </a:r>
           </a:p>
           <a:p>
@@ -4260,7 +4451,97 @@
               </a:defRPr>
             </a:pPr>
             <a:r>
-              <a:t>Mission: accessible bilingual support with transparent evidence and human referral boundaries.</a:t>
+              <a:t>Training and Testing Evidence</a:t>
+            </a:r>
+          </a:p>
+          <a:p>
+            <a:pPr lvl="1">
+              <a:spcAft>
+                <a:spcPts val="600"/>
+              </a:spcAft>
+              <a:defRPr sz="1600">
+                <a:solidFill>
+                  <a:srgbClr val="716874"/>
+                </a:solidFill>
+              </a:defRPr>
+            </a:pPr>
+            <a:r>
+              <a:t>Functional and testing evidence</a:t>
+            </a:r>
+          </a:p>
+          <a:p>
+            <a:pPr lvl="1">
+              <a:spcAft>
+                <a:spcPts val="600"/>
+              </a:spcAft>
+              <a:defRPr sz="1600">
+                <a:solidFill>
+                  <a:srgbClr val="716874"/>
+                </a:solidFill>
+              </a:defRPr>
+            </a:pPr>
+            <a:r>
+              <a:t>What was trained—and what was not</a:t>
+            </a:r>
+          </a:p>
+          <a:p>
+            <a:pPr>
+              <a:spcAft>
+                <a:spcPts val="1500"/>
+              </a:spcAft>
+              <a:defRPr sz="2000">
+                <a:solidFill>
+                  <a:srgbClr val="302A32"/>
+                </a:solidFill>
+              </a:defRPr>
+            </a:pPr>
+            <a:r>
+              <a:t>Results and Discussion</a:t>
+            </a:r>
+          </a:p>
+          <a:p>
+            <a:pPr lvl="1">
+              <a:spcAft>
+                <a:spcPts val="600"/>
+              </a:spcAft>
+              <a:defRPr sz="1600">
+                <a:solidFill>
+                  <a:srgbClr val="716874"/>
+                </a:solidFill>
+              </a:defRPr>
+            </a:pPr>
+            <a:r>
+              <a:t>Results, limitations and real-world validity</a:t>
+            </a:r>
+          </a:p>
+          <a:p>
+            <a:pPr>
+              <a:spcAft>
+                <a:spcPts val="1500"/>
+              </a:spcAft>
+              <a:defRPr sz="2000">
+                <a:solidFill>
+                  <a:srgbClr val="302A32"/>
+                </a:solidFill>
+              </a:defRPr>
+            </a:pPr>
+            <a:r>
+              <a:t>Conclusions</a:t>
+            </a:r>
+          </a:p>
+          <a:p>
+            <a:pPr lvl="1">
+              <a:spcAft>
+                <a:spcPts val="600"/>
+              </a:spcAft>
+              <a:defRPr sz="1600">
+                <a:solidFill>
+                  <a:srgbClr val="716874"/>
+                </a:solidFill>
+              </a:defRPr>
+            </a:pPr>
+            <a:r>
+              <a:t>Recommendations and impact</a:t>
             </a:r>
           </a:p>
         </p:txBody>
@@ -4321,7 +4602,7 @@
               </a:defRPr>
             </a:pPr>
             <a:r>
-              <a:t>2. Literature synthesis and gap</a:t>
+              <a:t>1. Problem and intended user</a:t>
             </a:r>
           </a:p>
         </p:txBody>
@@ -4359,7 +4640,7 @@
               </a:defRPr>
             </a:pPr>
             <a:r>
-              <a:t>Maternal chatbots mostly emphasize pregnancy, clinical tracking, or English-speaking populations.</a:t>
+              <a:t>The first months after childbirth can involve sadness, anxiety, guilt, isolation and exhaustion.</a:t>
             </a:r>
           </a:p>
           <a:p>
@@ -4374,7 +4655,7 @@
               </a:defRPr>
             </a:pPr>
             <a:r>
-              <a:t>African-language performance and reviewed Kinyarwanda resources remain limited.</a:t>
+              <a:t>Kinyarwanda-speaking mothers have limited access to culturally reviewed digital support.</a:t>
             </a:r>
           </a:p>
           <a:p>
@@ -4389,7 +4670,7 @@
               </a:defRPr>
             </a:pPr>
             <a:r>
-              <a:t>Generative flexibility creates risk when health responses are unsupported.</a:t>
+              <a:t>The assistant must support the mother while refusing diagnosis, emergency care and unrelated requests.</a:t>
             </a:r>
           </a:p>
           <a:p>
@@ -4404,7 +4685,7 @@
               </a:defRPr>
             </a:pPr>
             <a:r>
-              <a:t>Gap: bilingual postpartum emotional support combining screening research, evidence grounding and deterministic safety.</a:t>
+              <a:t>Mission: accessible bilingual support with transparent evidence and human referral boundaries.</a:t>
             </a:r>
           </a:p>
         </p:txBody>
@@ -4465,7 +4746,7 @@
               </a:defRPr>
             </a:pPr>
             <a:r>
-              <a:t>3. Objectives and strict scope</a:t>
+              <a:t>2. Literature synthesis and gap</a:t>
             </a:r>
           </a:p>
         </p:txBody>
@@ -4503,7 +4784,7 @@
               </a:defRPr>
             </a:pPr>
             <a:r>
-              <a:t>Train and compare seven classifiers on licensed postpartum participant data.</a:t>
+              <a:t>Maternal chatbots mostly emphasize pregnancy, clinical tracking, or English-speaking populations.</a:t>
             </a:r>
           </a:p>
           <a:p>
@@ -4518,7 +4799,7 @@
               </a:defRPr>
             </a:pPr>
             <a:r>
-              <a:t>Build a practical reduced-input, non-diagnostic guided check-in.</a:t>
+              <a:t>African-language performance and reviewed Kinyarwanda resources remain limited.</a:t>
             </a:r>
           </a:p>
           <a:p>
@@ -4533,7 +4814,7 @@
               </a:defRPr>
             </a:pPr>
             <a:r>
-              <a:t>Support reformulated English and Kinyarwanda emotional messages through retrieval by similarity.</a:t>
+              <a:t>Generative flexibility creates risk when health responses are unsupported.</a:t>
             </a:r>
           </a:p>
           <a:p>
@@ -4548,22 +4829,7 @@
               </a:defRPr>
             </a:pPr>
             <a:r>
-              <a:t>Place crisis, acute-health, baby-care and unrelated-topic rules before generation.</a:t>
-            </a:r>
-          </a:p>
-          <a:p>
-            <a:pPr>
-              <a:spcAft>
-                <a:spcPts val="1500"/>
-              </a:spcAft>
-              <a:defRPr sz="2000">
-                <a:solidFill>
-                  <a:srgbClr val="302A32"/>
-                </a:solidFill>
-              </a:defRPr>
-            </a:pPr>
-            <a:r>
-              <a:t>Evaluate with held-out metrics, automated tests, benchmarks and transparent limitations.</a:t>
+              <a:t>Gap: bilingual postpartum emotional support combining screening research, evidence grounding and deterministic safety.</a:t>
             </a:r>
           </a:p>
         </p:txBody>
@@ -4577,6 +4843,165 @@
 </file>
 
 <file path=ppt/slides/slide5.xml><?xml version="1.0" encoding="utf-8"?>
+<p:sld xmlns:a="http://schemas.openxmlformats.org/drawingml/2006/main" xmlns:p="http://schemas.openxmlformats.org/presentationml/2006/main" xmlns:r="http://schemas.openxmlformats.org/officeDocument/2006/relationships">
+  <p:cSld>
+    <p:bg>
+      <p:bgPr>
+        <a:solidFill>
+          <a:srgbClr val="F8F1E8"/>
+        </a:solidFill>
+        <a:effectLst/>
+      </p:bgPr>
+    </p:bg>
+    <p:spTree>
+      <p:nvGrpSpPr>
+        <p:cNvPr id="1" name=""/>
+        <p:cNvGrpSpPr/>
+        <p:nvPr/>
+      </p:nvGrpSpPr>
+      <p:grpSpPr/>
+      <p:sp>
+        <p:nvSpPr>
+          <p:cNvPr id="2" name="TextBox 1"/>
+          <p:cNvSpPr txBox="1"/>
+          <p:nvPr/>
+        </p:nvSpPr>
+        <p:spPr>
+          <a:xfrm>
+            <a:off x="594360" y="320040"/>
+            <a:ext cx="10972800" cy="640080"/>
+          </a:xfrm>
+          <a:prstGeom prst="rect">
+            <a:avLst/>
+          </a:prstGeom>
+          <a:noFill/>
+        </p:spPr>
+        <p:txBody>
+          <a:bodyPr wrap="none">
+            <a:spAutoFit/>
+          </a:bodyPr>
+          <a:lstStyle/>
+          <a:p>
+            <a:pPr>
+              <a:defRPr sz="2700" b="1">
+                <a:solidFill>
+                  <a:srgbClr val="302A32"/>
+                </a:solidFill>
+              </a:defRPr>
+            </a:pPr>
+            <a:r>
+              <a:t>3. Objectives and strict scope</a:t>
+            </a:r>
+          </a:p>
+        </p:txBody>
+      </p:sp>
+      <p:sp>
+        <p:nvSpPr>
+          <p:cNvPr id="3" name="TextBox 2"/>
+          <p:cNvSpPr txBox="1"/>
+          <p:nvPr/>
+        </p:nvSpPr>
+        <p:spPr>
+          <a:xfrm>
+            <a:off x="731520" y="1508760"/>
+            <a:ext cx="10698480" cy="4709160"/>
+          </a:xfrm>
+          <a:prstGeom prst="rect">
+            <a:avLst/>
+          </a:prstGeom>
+          <a:noFill/>
+        </p:spPr>
+        <p:txBody>
+          <a:bodyPr wrap="none">
+            <a:spAutoFit/>
+          </a:bodyPr>
+          <a:lstStyle/>
+          <a:p>
+            <a:pPr>
+              <a:spcAft>
+                <a:spcPts val="1500"/>
+              </a:spcAft>
+              <a:defRPr sz="2000">
+                <a:solidFill>
+                  <a:srgbClr val="302A32"/>
+                </a:solidFill>
+              </a:defRPr>
+            </a:pPr>
+            <a:r>
+              <a:t>Train and compare seven classifiers on licensed postpartum participant data.</a:t>
+            </a:r>
+          </a:p>
+          <a:p>
+            <a:pPr>
+              <a:spcAft>
+                <a:spcPts val="1500"/>
+              </a:spcAft>
+              <a:defRPr sz="2000">
+                <a:solidFill>
+                  <a:srgbClr val="302A32"/>
+                </a:solidFill>
+              </a:defRPr>
+            </a:pPr>
+            <a:r>
+              <a:t>Build a practical reduced-input, non-diagnostic guided check-in.</a:t>
+            </a:r>
+          </a:p>
+          <a:p>
+            <a:pPr>
+              <a:spcAft>
+                <a:spcPts val="1500"/>
+              </a:spcAft>
+              <a:defRPr sz="2000">
+                <a:solidFill>
+                  <a:srgbClr val="302A32"/>
+                </a:solidFill>
+              </a:defRPr>
+            </a:pPr>
+            <a:r>
+              <a:t>Support reformulated English and Kinyarwanda emotional messages through retrieval by similarity.</a:t>
+            </a:r>
+          </a:p>
+          <a:p>
+            <a:pPr>
+              <a:spcAft>
+                <a:spcPts val="1500"/>
+              </a:spcAft>
+              <a:defRPr sz="2000">
+                <a:solidFill>
+                  <a:srgbClr val="302A32"/>
+                </a:solidFill>
+              </a:defRPr>
+            </a:pPr>
+            <a:r>
+              <a:t>Place crisis, acute-health, baby-care and unrelated-topic rules before generation.</a:t>
+            </a:r>
+          </a:p>
+          <a:p>
+            <a:pPr>
+              <a:spcAft>
+                <a:spcPts val="1500"/>
+              </a:spcAft>
+              <a:defRPr sz="2000">
+                <a:solidFill>
+                  <a:srgbClr val="302A32"/>
+                </a:solidFill>
+              </a:defRPr>
+            </a:pPr>
+            <a:r>
+              <a:t>Evaluate with held-out metrics, automated tests, benchmarks and transparent limitations.</a:t>
+            </a:r>
+          </a:p>
+        </p:txBody>
+      </p:sp>
+    </p:spTree>
+  </p:cSld>
+  <p:clrMapOvr>
+    <a:masterClrMapping/>
+  </p:clrMapOvr>
+</p:sld>
+</file>
+
+<file path=ppt/slides/slide6.xml><?xml version="1.0" encoding="utf-8"?>
 <p:sld xmlns:a="http://schemas.openxmlformats.org/drawingml/2006/main" xmlns:p="http://schemas.openxmlformats.org/presentationml/2006/main" xmlns:r="http://schemas.openxmlformats.org/officeDocument/2006/relationships">
   <p:cSld>
     <p:bg>
@@ -4759,7 +5184,7 @@
 </p:sld>
 </file>
 
-<file path=ppt/slides/slide6.xml><?xml version="1.0" encoding="utf-8"?>
+<file path=ppt/slides/slide7.xml><?xml version="1.0" encoding="utf-8"?>
 <p:sld xmlns:a="http://schemas.openxmlformats.org/drawingml/2006/main" xmlns:p="http://schemas.openxmlformats.org/presentationml/2006/main" xmlns:r="http://schemas.openxmlformats.org/officeDocument/2006/relationships">
   <p:cSld>
     <p:bg>
@@ -4942,189 +5367,6 @@
 </p:sld>
 </file>
 
-<file path=ppt/slides/slide7.xml><?xml version="1.0" encoding="utf-8"?>
-<p:sld xmlns:a="http://schemas.openxmlformats.org/drawingml/2006/main" xmlns:p="http://schemas.openxmlformats.org/presentationml/2006/main" xmlns:r="http://schemas.openxmlformats.org/officeDocument/2006/relationships">
-  <p:cSld>
-    <p:bg>
-      <p:bgPr>
-        <a:solidFill>
-          <a:srgbClr val="F8F1E8"/>
-        </a:solidFill>
-        <a:effectLst/>
-      </p:bgPr>
-    </p:bg>
-    <p:spTree>
-      <p:nvGrpSpPr>
-        <p:cNvPr id="1" name=""/>
-        <p:cNvGrpSpPr/>
-        <p:nvPr/>
-      </p:nvGrpSpPr>
-      <p:grpSpPr/>
-      <p:sp>
-        <p:nvSpPr>
-          <p:cNvPr id="2" name="TextBox 1"/>
-          <p:cNvSpPr txBox="1"/>
-          <p:nvPr/>
-        </p:nvSpPr>
-        <p:spPr>
-          <a:xfrm>
-            <a:off x="594360" y="320040"/>
-            <a:ext cx="10972800" cy="640080"/>
-          </a:xfrm>
-          <a:prstGeom prst="rect">
-            <a:avLst/>
-          </a:prstGeom>
-          <a:noFill/>
-        </p:spPr>
-        <p:txBody>
-          <a:bodyPr wrap="none">
-            <a:spAutoFit/>
-          </a:bodyPr>
-          <a:lstStyle/>
-          <a:p>
-            <a:pPr>
-              <a:defRPr sz="2700" b="1">
-                <a:solidFill>
-                  <a:srgbClr val="302A32"/>
-                </a:solidFill>
-              </a:defRPr>
-            </a:pPr>
-            <a:r>
-              <a:t>6. Full-model results</a:t>
-            </a:r>
-          </a:p>
-        </p:txBody>
-      </p:sp>
-      <p:sp>
-        <p:nvSpPr>
-          <p:cNvPr id="3" name="TextBox 2"/>
-          <p:cNvSpPr txBox="1"/>
-          <p:nvPr/>
-        </p:nvSpPr>
-        <p:spPr>
-          <a:xfrm>
-            <a:off x="731520" y="1508760"/>
-            <a:ext cx="5486400" cy="4709160"/>
-          </a:xfrm>
-          <a:prstGeom prst="rect">
-            <a:avLst/>
-          </a:prstGeom>
-          <a:noFill/>
-        </p:spPr>
-        <p:txBody>
-          <a:bodyPr wrap="none">
-            <a:spAutoFit/>
-          </a:bodyPr>
-          <a:lstStyle/>
-          <a:p>
-            <a:pPr>
-              <a:spcAft>
-                <a:spcPts val="1500"/>
-              </a:spcAft>
-              <a:defRPr sz="1800">
-                <a:solidFill>
-                  <a:srgbClr val="302A32"/>
-                </a:solidFill>
-              </a:defRPr>
-            </a:pPr>
-            <a:r>
-              <a:t>Random Forest selected • 46 predictors.</a:t>
-            </a:r>
-          </a:p>
-          <a:p>
-            <a:pPr>
-              <a:spcAft>
-                <a:spcPts val="1500"/>
-              </a:spcAft>
-              <a:defRPr sz="1800">
-                <a:solidFill>
-                  <a:srgbClr val="302A32"/>
-                </a:solidFill>
-              </a:defRPr>
-            </a:pPr>
-            <a:r>
-              <a:t>Accuracy 0.8083 • Precision 0.7679.</a:t>
-            </a:r>
-          </a:p>
-          <a:p>
-            <a:pPr>
-              <a:spcAft>
-                <a:spcPts val="1500"/>
-              </a:spcAft>
-              <a:defRPr sz="1800">
-                <a:solidFill>
-                  <a:srgbClr val="302A32"/>
-                </a:solidFill>
-              </a:defRPr>
-            </a:pPr>
-            <a:r>
-              <a:t>Recall 0.8113 • F1 0.7890.</a:t>
-            </a:r>
-          </a:p>
-          <a:p>
-            <a:pPr>
-              <a:spcAft>
-                <a:spcPts val="1500"/>
-              </a:spcAft>
-              <a:defRPr sz="1800">
-                <a:solidFill>
-                  <a:srgbClr val="302A32"/>
-                </a:solidFill>
-              </a:defRPr>
-            </a:pPr>
-            <a:r>
-              <a:t>43/53 elevated cases detected; 10 missed; 13 false alerts.</a:t>
-            </a:r>
-          </a:p>
-          <a:p>
-            <a:pPr>
-              <a:spcAft>
-                <a:spcPts val="1500"/>
-              </a:spcAft>
-              <a:defRPr sz="1800">
-                <a:solidFill>
-                  <a:srgbClr val="302A32"/>
-                </a:solidFill>
-              </a:defRPr>
-            </a:pPr>
-            <a:r>
-              <a:t>Held-out performance is screening research, not diagnosis.</a:t>
-            </a:r>
-          </a:p>
-        </p:txBody>
-      </p:sp>
-      <p:pic>
-        <p:nvPicPr>
-          <p:cNvPr id="4" name="Picture 3" descr="06_selected_model_test_confusion_matrix.png"/>
-          <p:cNvPicPr>
-            <a:picLocks noChangeAspect="1"/>
-          </p:cNvPicPr>
-          <p:nvPr/>
-        </p:nvPicPr>
-        <p:blipFill>
-          <a:blip r:embed="rId2"/>
-          <a:stretch>
-            <a:fillRect/>
-          </a:stretch>
-        </p:blipFill>
-        <p:spPr>
-          <a:xfrm>
-            <a:off x="6446520" y="1508760"/>
-            <a:ext cx="5257800" cy="4331315"/>
-          </a:xfrm>
-          <a:prstGeom prst="rect">
-            <a:avLst/>
-          </a:prstGeom>
-        </p:spPr>
-      </p:pic>
-    </p:spTree>
-  </p:cSld>
-  <p:clrMapOvr>
-    <a:masterClrMapping/>
-  </p:clrMapOvr>
-</p:sld>
-</file>
-
 <file path=ppt/slides/slide8.xml><?xml version="1.0" encoding="utf-8"?>
 <p:sld xmlns:a="http://schemas.openxmlformats.org/drawingml/2006/main" xmlns:p="http://schemas.openxmlformats.org/presentationml/2006/main" xmlns:r="http://schemas.openxmlformats.org/officeDocument/2006/relationships">
   <p:cSld>
@@ -5173,7 +5415,7 @@
               </a:defRPr>
             </a:pPr>
             <a:r>
-              <a:t>7. Practical guided check-in</a:t>
+              <a:t>6. Full-model results</a:t>
             </a:r>
           </a:p>
         </p:txBody>
@@ -5211,7 +5453,7 @@
               </a:defRPr>
             </a:pPr>
             <a:r>
-              <a:t>Same seven algorithm families compared using 15 understandable inputs.</a:t>
+              <a:t>Random Forest selected • 46 predictors.</a:t>
             </a:r>
           </a:p>
           <a:p>
@@ -5226,7 +5468,7 @@
               </a:defRPr>
             </a:pPr>
             <a:r>
-              <a:t>Logistic Regression selected by validation F1.</a:t>
+              <a:t>Accuracy 0.8083 • Precision 0.7679.</a:t>
             </a:r>
           </a:p>
           <a:p>
@@ -5241,7 +5483,7 @@
               </a:defRPr>
             </a:pPr>
             <a:r>
-              <a:t>Accuracy 0.7667 • Precision 0.7049.</a:t>
+              <a:t>Recall 0.8113 • F1 0.7890.</a:t>
             </a:r>
           </a:p>
           <a:p>
@@ -5256,7 +5498,7 @@
               </a:defRPr>
             </a:pPr>
             <a:r>
-              <a:t>Recall 0.8113 • F1 0.7544.</a:t>
+              <a:t>43/53 elevated cases detected; 10 missed; 13 false alerts.</a:t>
             </a:r>
           </a:p>
           <a:p>
@@ -5271,7 +5513,7 @@
               </a:defRPr>
             </a:pPr>
             <a:r>
-              <a:t>Same recall as the full model, with more false alerts but much lower input burden.</a:t>
+              <a:t>Held-out performance is screening research, not diagnosis.</a:t>
             </a:r>
           </a:p>
         </p:txBody>
@@ -5356,14 +5598,112 @@
               </a:defRPr>
             </a:pPr>
             <a:r>
-              <a:t>8. Current system architecture</a:t>
+              <a:t>7. Practical guided check-in</a:t>
+            </a:r>
+          </a:p>
+        </p:txBody>
+      </p:sp>
+      <p:sp>
+        <p:nvSpPr>
+          <p:cNvPr id="3" name="TextBox 2"/>
+          <p:cNvSpPr txBox="1"/>
+          <p:nvPr/>
+        </p:nvSpPr>
+        <p:spPr>
+          <a:xfrm>
+            <a:off x="731520" y="1508760"/>
+            <a:ext cx="5486400" cy="4709160"/>
+          </a:xfrm>
+          <a:prstGeom prst="rect">
+            <a:avLst/>
+          </a:prstGeom>
+          <a:noFill/>
+        </p:spPr>
+        <p:txBody>
+          <a:bodyPr wrap="none">
+            <a:spAutoFit/>
+          </a:bodyPr>
+          <a:lstStyle/>
+          <a:p>
+            <a:pPr>
+              <a:spcAft>
+                <a:spcPts val="1500"/>
+              </a:spcAft>
+              <a:defRPr sz="1800">
+                <a:solidFill>
+                  <a:srgbClr val="302A32"/>
+                </a:solidFill>
+              </a:defRPr>
+            </a:pPr>
+            <a:r>
+              <a:t>Same seven algorithm families compared using 15 understandable inputs.</a:t>
+            </a:r>
+          </a:p>
+          <a:p>
+            <a:pPr>
+              <a:spcAft>
+                <a:spcPts val="1500"/>
+              </a:spcAft>
+              <a:defRPr sz="1800">
+                <a:solidFill>
+                  <a:srgbClr val="302A32"/>
+                </a:solidFill>
+              </a:defRPr>
+            </a:pPr>
+            <a:r>
+              <a:t>Logistic Regression selected by validation F1.</a:t>
+            </a:r>
+          </a:p>
+          <a:p>
+            <a:pPr>
+              <a:spcAft>
+                <a:spcPts val="1500"/>
+              </a:spcAft>
+              <a:defRPr sz="1800">
+                <a:solidFill>
+                  <a:srgbClr val="302A32"/>
+                </a:solidFill>
+              </a:defRPr>
+            </a:pPr>
+            <a:r>
+              <a:t>Accuracy 0.7667 • Precision 0.7049.</a:t>
+            </a:r>
+          </a:p>
+          <a:p>
+            <a:pPr>
+              <a:spcAft>
+                <a:spcPts val="1500"/>
+              </a:spcAft>
+              <a:defRPr sz="1800">
+                <a:solidFill>
+                  <a:srgbClr val="302A32"/>
+                </a:solidFill>
+              </a:defRPr>
+            </a:pPr>
+            <a:r>
+              <a:t>Recall 0.8113 • F1 0.7544.</a:t>
+            </a:r>
+          </a:p>
+          <a:p>
+            <a:pPr>
+              <a:spcAft>
+                <a:spcPts val="1500"/>
+              </a:spcAft>
+              <a:defRPr sz="1800">
+                <a:solidFill>
+                  <a:srgbClr val="302A32"/>
+                </a:solidFill>
+              </a:defRPr>
+            </a:pPr>
+            <a:r>
+              <a:t>Same recall as the full model, with more false alerts but much lower input burden.</a:t>
             </a:r>
           </a:p>
         </p:txBody>
       </p:sp>
       <p:pic>
         <p:nvPicPr>
-          <p:cNvPr id="3" name="Picture 2" descr="system_architecture_layered.png"/>
+          <p:cNvPr id="4" name="Picture 3" descr="06_selected_model_test_confusion_matrix.png"/>
           <p:cNvPicPr>
             <a:picLocks noChangeAspect="1"/>
           </p:cNvPicPr>
@@ -5377,8 +5717,8 @@
         </p:blipFill>
         <p:spPr>
           <a:xfrm>
-            <a:off x="502920" y="1143000"/>
-            <a:ext cx="11201400" cy="6266052"/>
+            <a:off x="6446520" y="1508760"/>
+            <a:ext cx="5257800" cy="4331315"/>
           </a:xfrm>
           <a:prstGeom prst="rect">
             <a:avLst/>
